--- a/Report and PPT/PPT_2210992328_2210990757_2210990279_2210992161.pptx
+++ b/Report and PPT/PPT_2210992328_2210990757_2210990279_2210992161.pptx
@@ -5,18 +5,20 @@
     <p:sldMasterId id="2147483648" r:id="rId4"/>
   </p:sldMasterIdLst>
   <p:notesMasterIdLst>
-    <p:notesMasterId r:id="rId11"/>
+    <p:notesMasterId r:id="rId13"/>
   </p:notesMasterIdLst>
   <p:handoutMasterIdLst>
-    <p:handoutMasterId r:id="rId12"/>
+    <p:handoutMasterId r:id="rId14"/>
   </p:handoutMasterIdLst>
   <p:sldIdLst>
     <p:sldId id="256" r:id="rId5"/>
     <p:sldId id="257" r:id="rId6"/>
     <p:sldId id="269" r:id="rId7"/>
     <p:sldId id="270" r:id="rId8"/>
-    <p:sldId id="271" r:id="rId9"/>
-    <p:sldId id="268" r:id="rId10"/>
+    <p:sldId id="272" r:id="rId9"/>
+    <p:sldId id="273" r:id="rId10"/>
+    <p:sldId id="271" r:id="rId11"/>
+    <p:sldId id="268" r:id="rId12"/>
   </p:sldIdLst>
   <p:sldSz cx="9144000" cy="6858000" type="screen4x3"/>
   <p:notesSz cx="7559675" cy="10691813"/>
@@ -229,7 +231,7 @@
             <a:fld id="{25D2B5EB-424D-4C39-A8AB-65F1D7895EF3}" type="datetimeFigureOut">
               <a:rPr lang="en-US" smtClean="0"/>
               <a:pPr/>
-              <a:t>4/29/2026</a:t>
+              <a:t>5/20/2026</a:t>
             </a:fld>
             <a:endParaRPr lang="en-US"/>
           </a:p>
@@ -412,7 +414,7 @@
             <a:fld id="{888BC1CF-45D5-4DEE-AAB8-8C5341844FC9}" type="datetimeFigureOut">
               <a:rPr lang="en-US" smtClean="0"/>
               <a:pPr/>
-              <a:t>4/29/2026</a:t>
+              <a:t>5/20/2026</a:t>
             </a:fld>
             <a:endParaRPr lang="en-US"/>
           </a:p>
@@ -4682,7 +4684,7 @@
         </p:nvSpPr>
         <p:spPr>
           <a:xfrm>
-            <a:off x="457200" y="0"/>
+            <a:off x="-1307592" y="71967"/>
             <a:ext cx="6019560" cy="837720"/>
           </a:xfrm>
           <a:prstGeom prst="rect">
@@ -4780,7 +4782,7 @@
         </p:nvSpPr>
         <p:spPr>
           <a:xfrm>
-            <a:off x="164008" y="1109742"/>
+            <a:off x="152640" y="817134"/>
             <a:ext cx="8838720" cy="4838571"/>
           </a:xfrm>
           <a:prstGeom prst="rect">
@@ -4814,6 +4816,9 @@
           </a:p>
           <a:p>
             <a:pPr marL="711200" lvl="0" indent="-571500">
+              <a:lnSpc>
+                <a:spcPct val="150000"/>
+              </a:lnSpc>
               <a:buClr>
                 <a:srgbClr val="000000"/>
               </a:buClr>
@@ -4831,20 +4836,10 @@
             </a:r>
           </a:p>
           <a:p>
-            <a:pPr marL="139700" lvl="0">
-              <a:buClr>
-                <a:srgbClr val="000000"/>
-              </a:buClr>
-              <a:buSzPts val="1400"/>
-            </a:pPr>
-            <a:endParaRPr lang="en-US" sz="2400" dirty="0">
-              <a:latin typeface="Times New Roman" panose="02020603050405020304" pitchFamily="18" charset="0"/>
-              <a:ea typeface="Calibri" panose="020F0502020204030204" pitchFamily="34" charset="0"/>
-              <a:cs typeface="Times New Roman" panose="02020603050405020304" pitchFamily="18" charset="0"/>
-            </a:endParaRPr>
-          </a:p>
-          <a:p>
             <a:pPr marL="711200" lvl="0" indent="-571500">
+              <a:lnSpc>
+                <a:spcPct val="150000"/>
+              </a:lnSpc>
               <a:buClr>
                 <a:srgbClr val="000000"/>
               </a:buClr>
@@ -4862,20 +4857,10 @@
             </a:r>
           </a:p>
           <a:p>
-            <a:pPr marL="139700" lvl="0">
-              <a:buClr>
-                <a:srgbClr val="000000"/>
-              </a:buClr>
-              <a:buSzPts val="1400"/>
-            </a:pPr>
-            <a:endParaRPr lang="en-US" sz="2400" dirty="0">
-              <a:latin typeface="Times New Roman" panose="02020603050405020304" pitchFamily="18" charset="0"/>
-              <a:ea typeface="Calibri" panose="020F0502020204030204" pitchFamily="34" charset="0"/>
-              <a:cs typeface="Times New Roman" panose="02020603050405020304" pitchFamily="18" charset="0"/>
-            </a:endParaRPr>
-          </a:p>
-          <a:p>
             <a:pPr marL="711200" lvl="0" indent="-571500">
+              <a:lnSpc>
+                <a:spcPct val="150000"/>
+              </a:lnSpc>
               <a:buClr>
                 <a:srgbClr val="000000"/>
               </a:buClr>
@@ -5070,6 +5055,36 @@
           </a:p>
         </p:txBody>
       </p:sp>
+      <p:pic>
+        <p:nvPicPr>
+          <p:cNvPr id="3" name="Picture 2">
+            <a:extLst>
+              <a:ext uri="{FF2B5EF4-FFF2-40B4-BE49-F238E27FC236}">
+                <a16:creationId xmlns:a16="http://schemas.microsoft.com/office/drawing/2014/main" id="{C76C6F98-3A1C-2C04-4615-5E1C8D51018E}"/>
+              </a:ext>
+            </a:extLst>
+          </p:cNvPr>
+          <p:cNvPicPr>
+            <a:picLocks noChangeAspect="1"/>
+          </p:cNvPicPr>
+          <p:nvPr/>
+        </p:nvPicPr>
+        <p:blipFill>
+          <a:blip r:embed="rId2"/>
+          <a:stretch>
+            <a:fillRect/>
+          </a:stretch>
+        </p:blipFill>
+        <p:spPr>
+          <a:xfrm>
+            <a:off x="2645785" y="4197174"/>
+            <a:ext cx="4201230" cy="2524026"/>
+          </a:xfrm>
+          <a:prstGeom prst="rect">
+            <a:avLst/>
+          </a:prstGeom>
+        </p:spPr>
+      </p:pic>
     </p:spTree>
   </p:cSld>
   <p:clrMapOvr>
@@ -5122,7 +5137,10 @@
           <a:lstStyle/>
           <a:p>
             <a:r>
-              <a:rPr lang="en-IN" dirty="0"/>
+              <a:rPr lang="en-IN" sz="3200" dirty="0">
+                <a:latin typeface="Times New Roman" panose="02020603050405020304" pitchFamily="18" charset="0"/>
+                <a:cs typeface="Times New Roman" panose="02020603050405020304" pitchFamily="18" charset="0"/>
+              </a:rPr>
               <a:t>Methodology / Approach</a:t>
             </a:r>
           </a:p>
@@ -5144,64 +5162,98 @@
             <p:ph type="subTitle"/>
           </p:nvPr>
         </p:nvSpPr>
-        <p:spPr/>
+        <p:spPr>
+          <a:xfrm>
+            <a:off x="118872" y="1014984"/>
+            <a:ext cx="8001000" cy="3922776"/>
+          </a:xfrm>
+        </p:spPr>
         <p:txBody>
           <a:bodyPr/>
           <a:lstStyle/>
           <a:p>
+            <a:pPr marL="342900" indent="-342900">
+              <a:lnSpc>
+                <a:spcPct val="150000"/>
+              </a:lnSpc>
+              <a:buFont typeface="Arial" panose="020B0604020202020204" pitchFamily="34" charset="0"/>
+              <a:buChar char="•"/>
+            </a:pPr>
             <a:r>
-              <a:rPr lang="en-US" sz="2000" dirty="0"/>
+              <a:rPr lang="en-US" sz="2400" dirty="0">
+                <a:latin typeface="Times New Roman" panose="02020603050405020304" pitchFamily="18" charset="0"/>
+                <a:cs typeface="Times New Roman" panose="02020603050405020304" pitchFamily="18" charset="0"/>
+              </a:rPr>
               <a:t>User uploads a product image, text description, or both</a:t>
             </a:r>
           </a:p>
           <a:p>
-            <a:pPr marL="0" indent="0">
-              <a:buNone/>
+            <a:pPr marL="342900" indent="-342900">
+              <a:lnSpc>
+                <a:spcPct val="150000"/>
+              </a:lnSpc>
+              <a:buFont typeface="Arial" panose="020B0604020202020204" pitchFamily="34" charset="0"/>
+              <a:buChar char="•"/>
             </a:pPr>
-            <a:endParaRPr lang="en-US" sz="2000" dirty="0"/>
-          </a:p>
-          <a:p>
             <a:r>
-              <a:rPr lang="en-US" sz="2000" dirty="0"/>
+              <a:rPr lang="en-US" sz="2400" dirty="0">
+                <a:latin typeface="Times New Roman" panose="02020603050405020304" pitchFamily="18" charset="0"/>
+                <a:cs typeface="Times New Roman" panose="02020603050405020304" pitchFamily="18" charset="0"/>
+              </a:rPr>
               <a:t>Backend sends input to Google Gemini AI with engineered prompts</a:t>
             </a:r>
           </a:p>
           <a:p>
-            <a:pPr marL="0" indent="0">
-              <a:buNone/>
+            <a:pPr marL="342900" indent="-342900">
+              <a:lnSpc>
+                <a:spcPct val="150000"/>
+              </a:lnSpc>
+              <a:buFont typeface="Arial" panose="020B0604020202020204" pitchFamily="34" charset="0"/>
+              <a:buChar char="•"/>
             </a:pPr>
-            <a:endParaRPr lang="en-US" sz="2000" dirty="0"/>
-          </a:p>
-          <a:p>
             <a:r>
-              <a:rPr lang="en-US" sz="2000" dirty="0"/>
+              <a:rPr lang="en-US" sz="2400" dirty="0">
+                <a:latin typeface="Times New Roman" panose="02020603050405020304" pitchFamily="18" charset="0"/>
+                <a:cs typeface="Times New Roman" panose="02020603050405020304" pitchFamily="18" charset="0"/>
+              </a:rPr>
               <a:t>Gemini returns structured JSON: title, description, category, attributes, tags, keywords</a:t>
             </a:r>
           </a:p>
           <a:p>
-            <a:pPr marL="0" indent="0">
-              <a:buNone/>
+            <a:pPr marL="342900" indent="-342900">
+              <a:lnSpc>
+                <a:spcPct val="150000"/>
+              </a:lnSpc>
+              <a:buFont typeface="Arial" panose="020B0604020202020204" pitchFamily="34" charset="0"/>
+              <a:buChar char="•"/>
             </a:pPr>
-            <a:endParaRPr lang="en-US" sz="2000" dirty="0"/>
-          </a:p>
-          <a:p>
             <a:r>
-              <a:rPr lang="en-US" sz="2000" dirty="0"/>
+              <a:rPr lang="en-US" sz="2400" dirty="0">
+                <a:latin typeface="Times New Roman" panose="02020603050405020304" pitchFamily="18" charset="0"/>
+                <a:cs typeface="Times New Roman" panose="02020603050405020304" pitchFamily="18" charset="0"/>
+              </a:rPr>
               <a:t>Results stored in MySQL and displayed on the React frontend</a:t>
             </a:r>
           </a:p>
           <a:p>
-            <a:pPr marL="0" indent="0">
-              <a:buNone/>
+            <a:pPr marL="342900" indent="-342900">
+              <a:lnSpc>
+                <a:spcPct val="150000"/>
+              </a:lnSpc>
+              <a:buFont typeface="Arial" panose="020B0604020202020204" pitchFamily="34" charset="0"/>
+              <a:buChar char="•"/>
             </a:pPr>
-            <a:endParaRPr lang="en-US" sz="2000" dirty="0"/>
-          </a:p>
-          <a:p>
             <a:r>
-              <a:rPr lang="en-US" sz="2000" dirty="0"/>
+              <a:rPr lang="en-US" sz="2400" dirty="0">
+                <a:latin typeface="Times New Roman" panose="02020603050405020304" pitchFamily="18" charset="0"/>
+                <a:cs typeface="Times New Roman" panose="02020603050405020304" pitchFamily="18" charset="0"/>
+              </a:rPr>
               <a:t>Supports single item and batch cataloging</a:t>
             </a:r>
-            <a:endParaRPr lang="en-IN" sz="2000" dirty="0"/>
+            <a:endParaRPr lang="en-IN" sz="2400" dirty="0">
+              <a:latin typeface="Times New Roman" panose="02020603050405020304" pitchFamily="18" charset="0"/>
+              <a:cs typeface="Times New Roman" panose="02020603050405020304" pitchFamily="18" charset="0"/>
+            </a:endParaRPr>
           </a:p>
         </p:txBody>
       </p:sp>
@@ -5268,7 +5320,10 @@
           <a:lstStyle/>
           <a:p>
             <a:r>
-              <a:rPr lang="en-IN" dirty="0"/>
+              <a:rPr lang="en-IN" sz="3200" dirty="0">
+                <a:latin typeface="Times New Roman" panose="02020603050405020304" pitchFamily="18" charset="0"/>
+                <a:cs typeface="Times New Roman" panose="02020603050405020304" pitchFamily="18" charset="0"/>
+              </a:rPr>
               <a:t> Key Findings / Outcomes</a:t>
             </a:r>
           </a:p>
@@ -5289,7 +5344,7 @@
         <p:spPr>
           <a:xfrm>
             <a:off x="109728" y="1014859"/>
-            <a:ext cx="8426196" cy="4524315"/>
+            <a:ext cx="8426196" cy="3349956"/>
           </a:xfrm>
           <a:prstGeom prst="rect">
             <a:avLst/>
@@ -5303,71 +5358,95 @@
           <a:lstStyle/>
           <a:p>
             <a:pPr marL="285750" indent="-285750">
+              <a:lnSpc>
+                <a:spcPct val="150000"/>
+              </a:lnSpc>
               <a:buFont typeface="Arial" panose="020B0604020202020204" pitchFamily="34" charset="0"/>
               <a:buChar char="•"/>
             </a:pPr>
             <a:r>
-              <a:rPr lang="en-IN" sz="2400" dirty="0"/>
+              <a:rPr lang="en-IN" sz="2400" dirty="0">
+                <a:latin typeface="Times New Roman" panose="02020603050405020304" pitchFamily="18" charset="0"/>
+                <a:cs typeface="Times New Roman" panose="02020603050405020304" pitchFamily="18" charset="0"/>
+              </a:rPr>
               <a:t>Reduced </a:t>
             </a:r>
             <a:r>
-              <a:rPr lang="en-IN" sz="2400" dirty="0" err="1"/>
+              <a:rPr lang="en-IN" sz="2400" dirty="0" err="1">
+                <a:latin typeface="Times New Roman" panose="02020603050405020304" pitchFamily="18" charset="0"/>
+                <a:cs typeface="Times New Roman" panose="02020603050405020304" pitchFamily="18" charset="0"/>
+              </a:rPr>
               <a:t>cataloging</a:t>
             </a:r>
             <a:r>
-              <a:rPr lang="en-IN" sz="2400" dirty="0"/>
+              <a:rPr lang="en-IN" sz="2400" dirty="0">
+                <a:latin typeface="Times New Roman" panose="02020603050405020304" pitchFamily="18" charset="0"/>
+                <a:cs typeface="Times New Roman" panose="02020603050405020304" pitchFamily="18" charset="0"/>
+              </a:rPr>
               <a:t> time from minutes to seconds per product</a:t>
             </a:r>
           </a:p>
           <a:p>
-            <a:endParaRPr lang="en-IN" sz="2400" dirty="0"/>
-          </a:p>
-          <a:p>
             <a:pPr marL="285750" indent="-285750">
+              <a:lnSpc>
+                <a:spcPct val="150000"/>
+              </a:lnSpc>
               <a:buFont typeface="Arial" panose="020B0604020202020204" pitchFamily="34" charset="0"/>
               <a:buChar char="•"/>
             </a:pPr>
             <a:r>
-              <a:rPr lang="en-IN" sz="2400" dirty="0"/>
+              <a:rPr lang="en-IN" sz="2400" dirty="0">
+                <a:latin typeface="Times New Roman" panose="02020603050405020304" pitchFamily="18" charset="0"/>
+                <a:cs typeface="Times New Roman" panose="02020603050405020304" pitchFamily="18" charset="0"/>
+              </a:rPr>
               <a:t>Consistent category and tag assignment across products</a:t>
             </a:r>
           </a:p>
           <a:p>
-            <a:endParaRPr lang="en-IN" sz="2400" dirty="0"/>
-          </a:p>
-          <a:p>
             <a:pPr marL="285750" indent="-285750">
+              <a:lnSpc>
+                <a:spcPct val="150000"/>
+              </a:lnSpc>
               <a:buFont typeface="Arial" panose="020B0604020202020204" pitchFamily="34" charset="0"/>
               <a:buChar char="•"/>
             </a:pPr>
             <a:r>
-              <a:rPr lang="en-IN" sz="2400" dirty="0"/>
+              <a:rPr lang="en-IN" sz="2400" dirty="0">
+                <a:latin typeface="Times New Roman" panose="02020603050405020304" pitchFamily="18" charset="0"/>
+                <a:cs typeface="Times New Roman" panose="02020603050405020304" pitchFamily="18" charset="0"/>
+              </a:rPr>
               <a:t>SEO-optimized titles and descriptions generated automatically</a:t>
             </a:r>
           </a:p>
           <a:p>
-            <a:endParaRPr lang="en-IN" sz="2400" dirty="0"/>
-          </a:p>
-          <a:p>
             <a:pPr marL="285750" indent="-285750">
+              <a:lnSpc>
+                <a:spcPct val="150000"/>
+              </a:lnSpc>
               <a:buFont typeface="Arial" panose="020B0604020202020204" pitchFamily="34" charset="0"/>
               <a:buChar char="•"/>
             </a:pPr>
             <a:r>
-              <a:rPr lang="en-IN" sz="2400" dirty="0"/>
+              <a:rPr lang="en-IN" sz="2400" dirty="0">
+                <a:latin typeface="Times New Roman" panose="02020603050405020304" pitchFamily="18" charset="0"/>
+                <a:cs typeface="Times New Roman" panose="02020603050405020304" pitchFamily="18" charset="0"/>
+              </a:rPr>
               <a:t>Confidence scoring on each AI-generated entry</a:t>
             </a:r>
           </a:p>
           <a:p>
-            <a:endParaRPr lang="en-IN" sz="2400" dirty="0"/>
-          </a:p>
-          <a:p>
             <a:pPr marL="285750" indent="-285750">
+              <a:lnSpc>
+                <a:spcPct val="150000"/>
+              </a:lnSpc>
               <a:buFont typeface="Arial" panose="020B0604020202020204" pitchFamily="34" charset="0"/>
               <a:buChar char="•"/>
             </a:pPr>
             <a:r>
-              <a:rPr lang="en-IN" sz="2400" dirty="0"/>
+              <a:rPr lang="en-IN" sz="2400" dirty="0">
+                <a:latin typeface="Times New Roman" panose="02020603050405020304" pitchFamily="18" charset="0"/>
+                <a:cs typeface="Times New Roman" panose="02020603050405020304" pitchFamily="18" charset="0"/>
+              </a:rPr>
               <a:t>Price positioning (budget / mid-range / premium) inferred from product features</a:t>
             </a:r>
           </a:p>
@@ -5387,6 +5466,198 @@
 </file>
 
 <file path=ppt/slides/slide5.xml><?xml version="1.0" encoding="utf-8"?>
+<p:sld xmlns:a="http://schemas.openxmlformats.org/drawingml/2006/main" xmlns:r="http://schemas.openxmlformats.org/officeDocument/2006/relationships" xmlns:p="http://schemas.openxmlformats.org/presentationml/2006/main">
+  <p:cSld>
+    <p:spTree>
+      <p:nvGrpSpPr>
+        <p:cNvPr id="1" name="">
+          <a:extLst>
+            <a:ext uri="{FF2B5EF4-FFF2-40B4-BE49-F238E27FC236}">
+              <a16:creationId xmlns:a16="http://schemas.microsoft.com/office/drawing/2014/main" id="{330103CA-E113-1BCC-3F6E-18B7EAE611A4}"/>
+            </a:ext>
+          </a:extLst>
+        </p:cNvPr>
+        <p:cNvGrpSpPr/>
+        <p:nvPr/>
+      </p:nvGrpSpPr>
+      <p:grpSpPr>
+        <a:xfrm>
+          <a:off x="0" y="0"/>
+          <a:ext cx="0" cy="0"/>
+          <a:chOff x="0" y="0"/>
+          <a:chExt cx="0" cy="0"/>
+        </a:xfrm>
+      </p:grpSpPr>
+      <p:pic>
+        <p:nvPicPr>
+          <p:cNvPr id="7" name="Picture 6">
+            <a:extLst>
+              <a:ext uri="{FF2B5EF4-FFF2-40B4-BE49-F238E27FC236}">
+                <a16:creationId xmlns:a16="http://schemas.microsoft.com/office/drawing/2014/main" id="{87042810-3411-E05C-28C0-1AC6DFBB527A}"/>
+              </a:ext>
+            </a:extLst>
+          </p:cNvPr>
+          <p:cNvPicPr>
+            <a:picLocks noChangeAspect="1"/>
+          </p:cNvPicPr>
+          <p:nvPr/>
+        </p:nvPicPr>
+        <p:blipFill>
+          <a:blip r:embed="rId2"/>
+          <a:stretch>
+            <a:fillRect/>
+          </a:stretch>
+        </p:blipFill>
+        <p:spPr>
+          <a:xfrm>
+            <a:off x="1252728" y="914040"/>
+            <a:ext cx="6382512" cy="2856040"/>
+          </a:xfrm>
+          <a:prstGeom prst="rect">
+            <a:avLst/>
+          </a:prstGeom>
+        </p:spPr>
+      </p:pic>
+      <p:pic>
+        <p:nvPicPr>
+          <p:cNvPr id="9" name="Picture 8">
+            <a:extLst>
+              <a:ext uri="{FF2B5EF4-FFF2-40B4-BE49-F238E27FC236}">
+                <a16:creationId xmlns:a16="http://schemas.microsoft.com/office/drawing/2014/main" id="{F809AE26-BF12-E31B-5FE8-900F6A11B5A4}"/>
+              </a:ext>
+            </a:extLst>
+          </p:cNvPr>
+          <p:cNvPicPr>
+            <a:picLocks noChangeAspect="1"/>
+          </p:cNvPicPr>
+          <p:nvPr/>
+        </p:nvPicPr>
+        <p:blipFill>
+          <a:blip r:embed="rId3"/>
+          <a:stretch>
+            <a:fillRect/>
+          </a:stretch>
+        </p:blipFill>
+        <p:spPr>
+          <a:xfrm>
+            <a:off x="1265607" y="3664261"/>
+            <a:ext cx="6369634" cy="2882535"/>
+          </a:xfrm>
+          <a:prstGeom prst="rect">
+            <a:avLst/>
+          </a:prstGeom>
+        </p:spPr>
+      </p:pic>
+    </p:spTree>
+    <p:extLst>
+      <p:ext uri="{BB962C8B-B14F-4D97-AF65-F5344CB8AC3E}">
+        <p14:creationId xmlns:p14="http://schemas.microsoft.com/office/powerpoint/2010/main" val="2585876875"/>
+      </p:ext>
+    </p:extLst>
+  </p:cSld>
+  <p:clrMapOvr>
+    <a:masterClrMapping/>
+  </p:clrMapOvr>
+</p:sld>
+</file>
+
+<file path=ppt/slides/slide6.xml><?xml version="1.0" encoding="utf-8"?>
+<p:sld xmlns:a="http://schemas.openxmlformats.org/drawingml/2006/main" xmlns:r="http://schemas.openxmlformats.org/officeDocument/2006/relationships" xmlns:p="http://schemas.openxmlformats.org/presentationml/2006/main">
+  <p:cSld>
+    <p:spTree>
+      <p:nvGrpSpPr>
+        <p:cNvPr id="1" name="">
+          <a:extLst>
+            <a:ext uri="{FF2B5EF4-FFF2-40B4-BE49-F238E27FC236}">
+              <a16:creationId xmlns:a16="http://schemas.microsoft.com/office/drawing/2014/main" id="{B6A24A0D-2514-C3F8-0F8F-6C4AA819CF25}"/>
+            </a:ext>
+          </a:extLst>
+        </p:cNvPr>
+        <p:cNvGrpSpPr/>
+        <p:nvPr/>
+      </p:nvGrpSpPr>
+      <p:grpSpPr>
+        <a:xfrm>
+          <a:off x="0" y="0"/>
+          <a:ext cx="0" cy="0"/>
+          <a:chOff x="0" y="0"/>
+          <a:chExt cx="0" cy="0"/>
+        </a:xfrm>
+      </p:grpSpPr>
+      <p:pic>
+        <p:nvPicPr>
+          <p:cNvPr id="3" name="Picture 2">
+            <a:extLst>
+              <a:ext uri="{FF2B5EF4-FFF2-40B4-BE49-F238E27FC236}">
+                <a16:creationId xmlns:a16="http://schemas.microsoft.com/office/drawing/2014/main" id="{1CB22622-9CE3-8EB7-3A95-BC27B55E4027}"/>
+              </a:ext>
+            </a:extLst>
+          </p:cNvPr>
+          <p:cNvPicPr>
+            <a:picLocks noChangeAspect="1"/>
+          </p:cNvPicPr>
+          <p:nvPr/>
+        </p:nvPicPr>
+        <p:blipFill>
+          <a:blip r:embed="rId2"/>
+          <a:stretch>
+            <a:fillRect/>
+          </a:stretch>
+        </p:blipFill>
+        <p:spPr>
+          <a:xfrm>
+            <a:off x="1837944" y="847837"/>
+            <a:ext cx="4681728" cy="2816424"/>
+          </a:xfrm>
+          <a:prstGeom prst="rect">
+            <a:avLst/>
+          </a:prstGeom>
+        </p:spPr>
+      </p:pic>
+      <p:pic>
+        <p:nvPicPr>
+          <p:cNvPr id="5" name="Picture 4">
+            <a:extLst>
+              <a:ext uri="{FF2B5EF4-FFF2-40B4-BE49-F238E27FC236}">
+                <a16:creationId xmlns:a16="http://schemas.microsoft.com/office/drawing/2014/main" id="{E6E8EEC6-2D1D-1050-C784-4A0E4B37375F}"/>
+              </a:ext>
+            </a:extLst>
+          </p:cNvPr>
+          <p:cNvPicPr>
+            <a:picLocks noChangeAspect="1"/>
+          </p:cNvPicPr>
+          <p:nvPr/>
+        </p:nvPicPr>
+        <p:blipFill>
+          <a:blip r:embed="rId3"/>
+          <a:stretch>
+            <a:fillRect/>
+          </a:stretch>
+        </p:blipFill>
+        <p:spPr>
+          <a:xfrm>
+            <a:off x="1601007" y="3856583"/>
+            <a:ext cx="5155601" cy="2510196"/>
+          </a:xfrm>
+          <a:prstGeom prst="rect">
+            <a:avLst/>
+          </a:prstGeom>
+        </p:spPr>
+      </p:pic>
+    </p:spTree>
+    <p:extLst>
+      <p:ext uri="{BB962C8B-B14F-4D97-AF65-F5344CB8AC3E}">
+        <p14:creationId xmlns:p14="http://schemas.microsoft.com/office/powerpoint/2010/main" val="3625588813"/>
+      </p:ext>
+    </p:extLst>
+  </p:cSld>
+  <p:clrMapOvr>
+    <a:masterClrMapping/>
+  </p:clrMapOvr>
+</p:sld>
+</file>
+
+<file path=ppt/slides/slide7.xml><?xml version="1.0" encoding="utf-8"?>
 <p:sld xmlns:a="http://schemas.openxmlformats.org/drawingml/2006/main" xmlns:r="http://schemas.openxmlformats.org/officeDocument/2006/relationships" xmlns:p="http://schemas.openxmlformats.org/presentationml/2006/main">
   <p:cSld>
     <p:spTree>
@@ -5430,7 +5701,10 @@
           <a:lstStyle/>
           <a:p>
             <a:r>
-              <a:rPr lang="en-IN" sz="4000" dirty="0"/>
+              <a:rPr lang="en-IN" sz="3200" dirty="0">
+                <a:latin typeface="Times New Roman" panose="02020603050405020304" pitchFamily="18" charset="0"/>
+                <a:cs typeface="Times New Roman" panose="02020603050405020304" pitchFamily="18" charset="0"/>
+              </a:rPr>
               <a:t>Conclusion &amp; Future Scope</a:t>
             </a:r>
           </a:p>
@@ -5454,74 +5728,126 @@
         </p:nvSpPr>
         <p:spPr>
           <a:xfrm>
-            <a:off x="210312" y="2057400"/>
-            <a:ext cx="8476128" cy="3524400"/>
+            <a:off x="109728" y="566568"/>
+            <a:ext cx="8476128" cy="4667760"/>
           </a:xfrm>
         </p:spPr>
         <p:txBody>
           <a:bodyPr/>
           <a:lstStyle/>
           <a:p>
+            <a:pPr>
+              <a:lnSpc>
+                <a:spcPct val="150000"/>
+              </a:lnSpc>
+            </a:pPr>
             <a:r>
-              <a:rPr lang="en-IN" sz="2400" dirty="0"/>
+              <a:rPr lang="en-IN" sz="2400" dirty="0">
+                <a:latin typeface="Times New Roman" panose="02020603050405020304" pitchFamily="18" charset="0"/>
+                <a:cs typeface="Times New Roman" panose="02020603050405020304" pitchFamily="18" charset="0"/>
+              </a:rPr>
               <a:t>Conclusion: Successfully built an AI-powered </a:t>
             </a:r>
             <a:r>
-              <a:rPr lang="en-IN" sz="2400" dirty="0" err="1"/>
+              <a:rPr lang="en-IN" sz="2400" dirty="0" err="1">
+                <a:latin typeface="Times New Roman" panose="02020603050405020304" pitchFamily="18" charset="0"/>
+                <a:cs typeface="Times New Roman" panose="02020603050405020304" pitchFamily="18" charset="0"/>
+              </a:rPr>
               <a:t>cataloging</a:t>
             </a:r>
             <a:r>
-              <a:rPr lang="en-IN" sz="2400" dirty="0"/>
+              <a:rPr lang="en-IN" sz="2400" dirty="0">
+                <a:latin typeface="Times New Roman" panose="02020603050405020304" pitchFamily="18" charset="0"/>
+                <a:cs typeface="Times New Roman" panose="02020603050405020304" pitchFamily="18" charset="0"/>
+              </a:rPr>
               <a:t> tool that automates structured product data generation for e-commerce</a:t>
             </a:r>
           </a:p>
           <a:p>
+            <a:pPr>
+              <a:lnSpc>
+                <a:spcPct val="150000"/>
+              </a:lnSpc>
+            </a:pPr>
             <a:r>
-              <a:rPr lang="en-IN" sz="2400" dirty="0"/>
+              <a:rPr lang="en-IN" sz="2400" dirty="0">
+                <a:latin typeface="Times New Roman" panose="02020603050405020304" pitchFamily="18" charset="0"/>
+                <a:cs typeface="Times New Roman" panose="02020603050405020304" pitchFamily="18" charset="0"/>
+              </a:rPr>
               <a:t>Future Scope:</a:t>
             </a:r>
           </a:p>
           <a:p>
             <a:pPr marL="457200" lvl="1" indent="0">
+              <a:lnSpc>
+                <a:spcPct val="150000"/>
+              </a:lnSpc>
               <a:buNone/>
             </a:pPr>
             <a:r>
-              <a:rPr lang="en-IN" sz="2000" dirty="0"/>
+              <a:rPr lang="en-IN" sz="2400" dirty="0">
+                <a:latin typeface="Times New Roman" panose="02020603050405020304" pitchFamily="18" charset="0"/>
+                <a:cs typeface="Times New Roman" panose="02020603050405020304" pitchFamily="18" charset="0"/>
+              </a:rPr>
               <a:t>1.Support for more AI models (OpenAI, Claude)</a:t>
             </a:r>
           </a:p>
           <a:p>
             <a:pPr marL="457200" lvl="1" indent="0">
+              <a:lnSpc>
+                <a:spcPct val="150000"/>
+              </a:lnSpc>
               <a:buNone/>
             </a:pPr>
             <a:r>
-              <a:rPr lang="en-IN" sz="2000" dirty="0"/>
+              <a:rPr lang="en-IN" sz="2400" dirty="0">
+                <a:latin typeface="Times New Roman" panose="02020603050405020304" pitchFamily="18" charset="0"/>
+                <a:cs typeface="Times New Roman" panose="02020603050405020304" pitchFamily="18" charset="0"/>
+              </a:rPr>
               <a:t>2.Bulk CSV import/export</a:t>
             </a:r>
           </a:p>
           <a:p>
             <a:pPr marL="457200" lvl="1" indent="0">
+              <a:lnSpc>
+                <a:spcPct val="150000"/>
+              </a:lnSpc>
               <a:buNone/>
             </a:pPr>
             <a:r>
-              <a:rPr lang="en-IN" sz="2000" dirty="0"/>
+              <a:rPr lang="en-IN" sz="2400" dirty="0">
+                <a:latin typeface="Times New Roman" panose="02020603050405020304" pitchFamily="18" charset="0"/>
+                <a:cs typeface="Times New Roman" panose="02020603050405020304" pitchFamily="18" charset="0"/>
+              </a:rPr>
               <a:t>3.Multi-language </a:t>
             </a:r>
             <a:r>
-              <a:rPr lang="en-IN" sz="2000" dirty="0" err="1"/>
+              <a:rPr lang="en-IN" sz="2400" dirty="0" err="1">
+                <a:latin typeface="Times New Roman" panose="02020603050405020304" pitchFamily="18" charset="0"/>
+                <a:cs typeface="Times New Roman" panose="02020603050405020304" pitchFamily="18" charset="0"/>
+              </a:rPr>
               <a:t>catalog</a:t>
             </a:r>
             <a:r>
-              <a:rPr lang="en-IN" sz="2000" dirty="0"/>
+              <a:rPr lang="en-IN" sz="2400" dirty="0">
+                <a:latin typeface="Times New Roman" panose="02020603050405020304" pitchFamily="18" charset="0"/>
+                <a:cs typeface="Times New Roman" panose="02020603050405020304" pitchFamily="18" charset="0"/>
+              </a:rPr>
               <a:t> generation</a:t>
             </a:r>
           </a:p>
           <a:p>
             <a:pPr marL="457200" lvl="1" indent="0">
+              <a:lnSpc>
+                <a:spcPct val="150000"/>
+              </a:lnSpc>
               <a:buNone/>
             </a:pPr>
             <a:r>
-              <a:rPr lang="en-IN" sz="2000" dirty="0"/>
+              <a:rPr lang="en-IN" sz="2400" dirty="0">
+                <a:latin typeface="Times New Roman" panose="02020603050405020304" pitchFamily="18" charset="0"/>
+                <a:cs typeface="Times New Roman" panose="02020603050405020304" pitchFamily="18" charset="0"/>
+              </a:rPr>
               <a:t>4.Integration with platforms like Shopify / WooCommerce</a:t>
             </a:r>
           </a:p>
@@ -5540,7 +5866,7 @@
 </p:sld>
 </file>
 
-<file path=ppt/slides/slide6.xml><?xml version="1.0" encoding="utf-8"?>
+<file path=ppt/slides/slide8.xml><?xml version="1.0" encoding="utf-8"?>
 <p:sld xmlns:a="http://schemas.openxmlformats.org/drawingml/2006/main" xmlns:r="http://schemas.openxmlformats.org/officeDocument/2006/relationships" xmlns:p="http://schemas.openxmlformats.org/presentationml/2006/main">
   <p:cSld>
     <p:spTree>
@@ -5647,7 +5973,7 @@
                   <a:spcPct val="100000"/>
                 </a:lnSpc>
               </a:pPr>
-              <a:t>6</a:t>
+              <a:t>8</a:t>
             </a:fld>
             <a:endParaRPr lang="en-GB" sz="1200" b="0" strike="noStrike" spc="-1">
               <a:latin typeface="Times New Roman"/>
@@ -6453,6 +6779,21 @@
 </file>
 
 <file path=customXml/item1.xml><?xml version="1.0" encoding="utf-8"?>
+<?mso-contentType ?>
+<FormTemplates xmlns="http://schemas.microsoft.com/sharepoint/v3/contenttype/forms">
+  <Display>DocumentLibraryForm</Display>
+  <Edit>DocumentLibraryForm</Edit>
+  <New>DocumentLibraryForm</New>
+</FormTemplates>
+</file>
+
+<file path=customXml/item2.xml><?xml version="1.0" encoding="utf-8"?>
+<p:properties xmlns:p="http://schemas.microsoft.com/office/2006/metadata/properties" xmlns:xsi="http://www.w3.org/2001/XMLSchema-instance" xmlns:pc="http://schemas.microsoft.com/office/infopath/2007/PartnerControls">
+  <documentManagement/>
+</p:properties>
+</file>
+
+<file path=customXml/item3.xml><?xml version="1.0" encoding="utf-8"?>
 <ct:contentTypeSchema xmlns:ct="http://schemas.microsoft.com/office/2006/metadata/contentType" xmlns:ma="http://schemas.microsoft.com/office/2006/metadata/properties/metaAttributes" ct:_="" ma:_="" ma:contentTypeName="Document" ma:contentTypeID="0x010100096F1BF43DDE004485E7A868D137D60A" ma:contentTypeVersion="0" ma:contentTypeDescription="Create a new document." ma:contentTypeScope="" ma:versionID="47fff7f98a9c49c088ba096c14cf4458">
   <xsd:schema xmlns:xsd="http://www.w3.org/2001/XMLSchema" xmlns:xs="http://www.w3.org/2001/XMLSchema" xmlns:p="http://schemas.microsoft.com/office/2006/metadata/properties" targetNamespace="http://schemas.microsoft.com/office/2006/metadata/properties" ma:root="true" ma:fieldsID="c05e9f2c4932a6a674126b9dde7716ea">
     <xsd:element name="properties">
@@ -6566,22 +6907,30 @@
 </ct:contentTypeSchema>
 </file>
 
-<file path=customXml/item2.xml><?xml version="1.0" encoding="utf-8"?>
-<?mso-contentType ?>
-<FormTemplates xmlns="http://schemas.microsoft.com/sharepoint/v3/contenttype/forms">
-  <Display>DocumentLibraryForm</Display>
-  <Edit>DocumentLibraryForm</Edit>
-  <New>DocumentLibraryForm</New>
-</FormTemplates>
+<file path=customXml/itemProps1.xml><?xml version="1.0" encoding="utf-8"?>
+<ds:datastoreItem xmlns:ds="http://schemas.openxmlformats.org/officeDocument/2006/customXml" ds:itemID="{737ED6F0-5E4C-4CD0-9B68-9C53F925A6F7}">
+  <ds:schemaRefs>
+    <ds:schemaRef ds:uri="http://schemas.microsoft.com/sharepoint/v3/contenttype/forms"/>
+  </ds:schemaRefs>
+</ds:datastoreItem>
 </file>
 
-<file path=customXml/item3.xml><?xml version="1.0" encoding="utf-8"?>
-<p:properties xmlns:p="http://schemas.microsoft.com/office/2006/metadata/properties" xmlns:xsi="http://www.w3.org/2001/XMLSchema-instance" xmlns:pc="http://schemas.microsoft.com/office/infopath/2007/PartnerControls">
-  <documentManagement/>
-</p:properties>
+<file path=customXml/itemProps2.xml><?xml version="1.0" encoding="utf-8"?>
+<ds:datastoreItem xmlns:ds="http://schemas.openxmlformats.org/officeDocument/2006/customXml" ds:itemID="{4A62A602-78C1-468C-BB25-57CD481DB741}">
+  <ds:schemaRefs>
+    <ds:schemaRef ds:uri="http://purl.org/dc/terms/"/>
+    <ds:schemaRef ds:uri="http://www.w3.org/XML/1998/namespace"/>
+    <ds:schemaRef ds:uri="http://purl.org/dc/dcmitype/"/>
+    <ds:schemaRef ds:uri="http://schemas.microsoft.com/office/2006/documentManagement/types"/>
+    <ds:schemaRef ds:uri="http://schemas.microsoft.com/office/2006/metadata/properties"/>
+    <ds:schemaRef ds:uri="http://purl.org/dc/elements/1.1/"/>
+    <ds:schemaRef ds:uri="http://schemas.microsoft.com/office/infopath/2007/PartnerControls"/>
+    <ds:schemaRef ds:uri="http://schemas.openxmlformats.org/package/2006/metadata/core-properties"/>
+  </ds:schemaRefs>
+</ds:datastoreItem>
 </file>
 
-<file path=customXml/itemProps1.xml><?xml version="1.0" encoding="utf-8"?>
+<file path=customXml/itemProps3.xml><?xml version="1.0" encoding="utf-8"?>
 <ds:datastoreItem xmlns:ds="http://schemas.openxmlformats.org/officeDocument/2006/customXml" ds:itemID="{491DF113-39A2-46D5-BFDA-E63300A9ECAB}">
   <ds:schemaRefs>
     <ds:schemaRef ds:uri="http://schemas.microsoft.com/office/2006/metadata/contentType"/>
@@ -6595,27 +6944,4 @@
     <ds:schemaRef ds:uri="http://schemas.microsoft.com/office/infopath/2007/PartnerControls"/>
   </ds:schemaRefs>
 </ds:datastoreItem>
-</file>
-
-<file path=customXml/itemProps2.xml><?xml version="1.0" encoding="utf-8"?>
-<ds:datastoreItem xmlns:ds="http://schemas.openxmlformats.org/officeDocument/2006/customXml" ds:itemID="{737ED6F0-5E4C-4CD0-9B68-9C53F925A6F7}">
-  <ds:schemaRefs>
-    <ds:schemaRef ds:uri="http://schemas.microsoft.com/sharepoint/v3/contenttype/forms"/>
-  </ds:schemaRefs>
-</ds:datastoreItem>
-</file>
-
-<file path=customXml/itemProps3.xml><?xml version="1.0" encoding="utf-8"?>
-<ds:datastoreItem xmlns:ds="http://schemas.openxmlformats.org/officeDocument/2006/customXml" ds:itemID="{4A62A602-78C1-468C-BB25-57CD481DB741}">
-  <ds:schemaRefs>
-    <ds:schemaRef ds:uri="http://purl.org/dc/terms/"/>
-    <ds:schemaRef ds:uri="http://www.w3.org/XML/1998/namespace"/>
-    <ds:schemaRef ds:uri="http://purl.org/dc/dcmitype/"/>
-    <ds:schemaRef ds:uri="http://schemas.microsoft.com/office/2006/documentManagement/types"/>
-    <ds:schemaRef ds:uri="http://schemas.microsoft.com/office/2006/metadata/properties"/>
-    <ds:schemaRef ds:uri="http://purl.org/dc/elements/1.1/"/>
-    <ds:schemaRef ds:uri="http://schemas.microsoft.com/office/infopath/2007/PartnerControls"/>
-    <ds:schemaRef ds:uri="http://schemas.openxmlformats.org/package/2006/metadata/core-properties"/>
-  </ds:schemaRefs>
-</ds:datastoreItem>
 </file>
--- a/Report and PPT/PPT_2210992328_2210990757_2210990279_2210992161.pptx
+++ b/Report and PPT/PPT_2210992328_2210990757_2210990279_2210992161.pptx
@@ -231,7 +231,7 @@
             <a:fld id="{25D2B5EB-424D-4C39-A8AB-65F1D7895EF3}" type="datetimeFigureOut">
               <a:rPr lang="en-US" smtClean="0"/>
               <a:pPr/>
-              <a:t>5/20/2026</a:t>
+              <a:t>5/21/2026</a:t>
             </a:fld>
             <a:endParaRPr lang="en-US"/>
           </a:p>
@@ -414,7 +414,7 @@
             <a:fld id="{888BC1CF-45D5-4DEE-AAB8-8C5341844FC9}" type="datetimeFigureOut">
               <a:rPr lang="en-US" smtClean="0"/>
               <a:pPr/>
-              <a:t>5/20/2026</a:t>
+              <a:t>5/21/2026</a:t>
             </a:fld>
             <a:endParaRPr lang="en-US"/>
           </a:p>
@@ -3508,15 +3508,15 @@
               </a:spcBef>
             </a:pPr>
             <a:r>
-              <a:rPr lang="en-US" sz="4800" dirty="0">
+              <a:rPr lang="en-US" sz="3600" dirty="0">
                 <a:latin typeface="Times New Roman" panose="02020603050405020304" pitchFamily="18" charset="0"/>
                 <a:ea typeface="Calibri" panose="020F0502020204030204" pitchFamily="34" charset="0"/>
                 <a:cs typeface="Times New Roman" panose="02020603050405020304" pitchFamily="18" charset="0"/>
               </a:rPr>
-              <a:t>Smart AI Cataloging Application</a:t>
+              <a:t>Smart AI Cataloging Application (Team-32)</a:t>
             </a:r>
             <a:br>
-              <a:rPr lang="en-US" sz="2000" b="0" strike="noStrike" spc="-1" dirty="0">
+              <a:rPr lang="en-US" sz="3600" b="0" strike="noStrike" spc="-1" dirty="0">
                 <a:solidFill>
                   <a:srgbClr val="000000"/>
                 </a:solidFill>
@@ -3525,7 +3525,7 @@
                 <a:cs typeface="Times New Roman" panose="02020603050405020304" pitchFamily="18" charset="0"/>
               </a:rPr>
             </a:br>
-            <a:endParaRPr lang="en-US" sz="2000" spc="-1" dirty="0">
+            <a:endParaRPr lang="en-US" sz="3600" spc="-1" dirty="0">
               <a:solidFill>
                 <a:srgbClr val="000000"/>
               </a:solidFill>
@@ -6779,21 +6779,6 @@
 </file>
 
 <file path=customXml/item1.xml><?xml version="1.0" encoding="utf-8"?>
-<?mso-contentType ?>
-<FormTemplates xmlns="http://schemas.microsoft.com/sharepoint/v3/contenttype/forms">
-  <Display>DocumentLibraryForm</Display>
-  <Edit>DocumentLibraryForm</Edit>
-  <New>DocumentLibraryForm</New>
-</FormTemplates>
-</file>
-
-<file path=customXml/item2.xml><?xml version="1.0" encoding="utf-8"?>
-<p:properties xmlns:p="http://schemas.microsoft.com/office/2006/metadata/properties" xmlns:xsi="http://www.w3.org/2001/XMLSchema-instance" xmlns:pc="http://schemas.microsoft.com/office/infopath/2007/PartnerControls">
-  <documentManagement/>
-</p:properties>
-</file>
-
-<file path=customXml/item3.xml><?xml version="1.0" encoding="utf-8"?>
 <ct:contentTypeSchema xmlns:ct="http://schemas.microsoft.com/office/2006/metadata/contentType" xmlns:ma="http://schemas.microsoft.com/office/2006/metadata/properties/metaAttributes" ct:_="" ma:_="" ma:contentTypeName="Document" ma:contentTypeID="0x010100096F1BF43DDE004485E7A868D137D60A" ma:contentTypeVersion="0" ma:contentTypeDescription="Create a new document." ma:contentTypeScope="" ma:versionID="47fff7f98a9c49c088ba096c14cf4458">
   <xsd:schema xmlns:xsd="http://www.w3.org/2001/XMLSchema" xmlns:xs="http://www.w3.org/2001/XMLSchema" xmlns:p="http://schemas.microsoft.com/office/2006/metadata/properties" targetNamespace="http://schemas.microsoft.com/office/2006/metadata/properties" ma:root="true" ma:fieldsID="c05e9f2c4932a6a674126b9dde7716ea">
     <xsd:element name="properties">
@@ -6907,10 +6892,33 @@
 </ct:contentTypeSchema>
 </file>
 
+<file path=customXml/item2.xml><?xml version="1.0" encoding="utf-8"?>
+<p:properties xmlns:p="http://schemas.microsoft.com/office/2006/metadata/properties" xmlns:xsi="http://www.w3.org/2001/XMLSchema-instance" xmlns:pc="http://schemas.microsoft.com/office/infopath/2007/PartnerControls">
+  <documentManagement/>
+</p:properties>
+</file>
+
+<file path=customXml/item3.xml><?xml version="1.0" encoding="utf-8"?>
+<?mso-contentType ?>
+<FormTemplates xmlns="http://schemas.microsoft.com/sharepoint/v3/contenttype/forms">
+  <Display>DocumentLibraryForm</Display>
+  <Edit>DocumentLibraryForm</Edit>
+  <New>DocumentLibraryForm</New>
+</FormTemplates>
+</file>
+
 <file path=customXml/itemProps1.xml><?xml version="1.0" encoding="utf-8"?>
-<ds:datastoreItem xmlns:ds="http://schemas.openxmlformats.org/officeDocument/2006/customXml" ds:itemID="{737ED6F0-5E4C-4CD0-9B68-9C53F925A6F7}">
+<ds:datastoreItem xmlns:ds="http://schemas.openxmlformats.org/officeDocument/2006/customXml" ds:itemID="{491DF113-39A2-46D5-BFDA-E63300A9ECAB}">
   <ds:schemaRefs>
-    <ds:schemaRef ds:uri="http://schemas.microsoft.com/sharepoint/v3/contenttype/forms"/>
+    <ds:schemaRef ds:uri="http://schemas.microsoft.com/office/2006/metadata/contentType"/>
+    <ds:schemaRef ds:uri="http://schemas.microsoft.com/office/2006/metadata/properties/metaAttributes"/>
+    <ds:schemaRef ds:uri="http://www.w3.org/2001/XMLSchema"/>
+    <ds:schemaRef ds:uri="http://schemas.microsoft.com/office/2006/metadata/properties"/>
+    <ds:schemaRef ds:uri="http://schemas.openxmlformats.org/package/2006/metadata/core-properties"/>
+    <ds:schemaRef ds:uri="http://purl.org/dc/elements/1.1/"/>
+    <ds:schemaRef ds:uri="http://purl.org/dc/terms/"/>
+    <ds:schemaRef ds:uri="http://schemas.microsoft.com/internal/obd"/>
+    <ds:schemaRef ds:uri="http://schemas.microsoft.com/office/infopath/2007/PartnerControls"/>
   </ds:schemaRefs>
 </ds:datastoreItem>
 </file>
@@ -6931,17 +6939,9 @@
 </file>
 
 <file path=customXml/itemProps3.xml><?xml version="1.0" encoding="utf-8"?>
-<ds:datastoreItem xmlns:ds="http://schemas.openxmlformats.org/officeDocument/2006/customXml" ds:itemID="{491DF113-39A2-46D5-BFDA-E63300A9ECAB}">
+<ds:datastoreItem xmlns:ds="http://schemas.openxmlformats.org/officeDocument/2006/customXml" ds:itemID="{737ED6F0-5E4C-4CD0-9B68-9C53F925A6F7}">
   <ds:schemaRefs>
-    <ds:schemaRef ds:uri="http://schemas.microsoft.com/office/2006/metadata/contentType"/>
-    <ds:schemaRef ds:uri="http://schemas.microsoft.com/office/2006/metadata/properties/metaAttributes"/>
-    <ds:schemaRef ds:uri="http://www.w3.org/2001/XMLSchema"/>
-    <ds:schemaRef ds:uri="http://schemas.microsoft.com/office/2006/metadata/properties"/>
-    <ds:schemaRef ds:uri="http://schemas.openxmlformats.org/package/2006/metadata/core-properties"/>
-    <ds:schemaRef ds:uri="http://purl.org/dc/elements/1.1/"/>
-    <ds:schemaRef ds:uri="http://purl.org/dc/terms/"/>
-    <ds:schemaRef ds:uri="http://schemas.microsoft.com/internal/obd"/>
-    <ds:schemaRef ds:uri="http://schemas.microsoft.com/office/infopath/2007/PartnerControls"/>
+    <ds:schemaRef ds:uri="http://schemas.microsoft.com/sharepoint/v3/contenttype/forms"/>
   </ds:schemaRefs>
 </ds:datastoreItem>
 </file>